--- a/viola jones.pptx
+++ b/viola jones.pptx
@@ -22,6 +22,7 @@
     <p:sldId id="274" r:id="rId16"/>
     <p:sldId id="273" r:id="rId17"/>
     <p:sldId id="272" r:id="rId18"/>
+    <p:sldId id="275" r:id="rId19"/>
   </p:sldIdLst>
   <p:sldSz cx="12192000" cy="6858000"/>
   <p:notesSz cx="6858000" cy="9144000"/>
@@ -120,13 +121,18 @@
       </a:defRPr>
     </a:lvl9pPr>
   </p:defaultTextStyle>
+  <p:extLst>
+    <p:ext uri="{EFAFB233-063F-42B5-8137-9DF3F51BA10A}">
+      <p15:sldGuideLst xmlns:p15="http://schemas.microsoft.com/office/powerpoint/2012/main"/>
+    </p:ext>
+  </p:extLst>
 </p:presentation>
 </file>
 
 <file path=ppt/revisionInfo.xml><?xml version="1.0" encoding="utf-8"?>
 <p1510:revInfo xmlns:a="http://schemas.openxmlformats.org/drawingml/2006/main" xmlns:r="http://schemas.openxmlformats.org/officeDocument/2006/relationships" xmlns:p1510="http://schemas.microsoft.com/office/powerpoint/2015/10/main">
   <p1510:revLst>
-    <p1510:client id="{596F53FF-A99C-42AB-8DDD-986D842ED491}" v="26" dt="2025-02-12T19:15:56.116"/>
+    <p1510:client id="{596F53FF-A99C-42AB-8DDD-986D842ED491}" v="31" dt="2025-02-12T19:42:18.079"/>
   </p1510:revLst>
 </p1510:revInfo>
 </file>
@@ -135,8 +141,8 @@
 <pc:chgInfo xmlns:a="http://schemas.openxmlformats.org/drawingml/2006/main" xmlns:r="http://schemas.openxmlformats.org/officeDocument/2006/relationships" xmlns:ac="http://schemas.microsoft.com/office/drawing/2013/main/command" xmlns:pc="http://schemas.microsoft.com/office/powerpoint/2013/main/command">
   <pc:docChgLst>
     <pc:chgData name="mm kk" userId="be1857fa1d370b1c" providerId="LiveId" clId="{596F53FF-A99C-42AB-8DDD-986D842ED491}"/>
-    <pc:docChg chg="custSel addSld delSld modSld">
-      <pc:chgData name="mm kk" userId="be1857fa1d370b1c" providerId="LiveId" clId="{596F53FF-A99C-42AB-8DDD-986D842ED491}" dt="2025-02-12T19:19:05.220" v="157" actId="1076"/>
+    <pc:docChg chg="undo custSel addSld delSld modSld">
+      <pc:chgData name="mm kk" userId="be1857fa1d370b1c" providerId="LiveId" clId="{596F53FF-A99C-42AB-8DDD-986D842ED491}" dt="2025-02-12T19:42:23.413" v="415" actId="20577"/>
       <pc:docMkLst>
         <pc:docMk/>
       </pc:docMkLst>
@@ -381,6 +387,44 @@
           </ac:picMkLst>
         </pc:picChg>
       </pc:sldChg>
+      <pc:sldChg chg="addSp delSp modSp new mod">
+        <pc:chgData name="mm kk" userId="be1857fa1d370b1c" providerId="LiveId" clId="{596F53FF-A99C-42AB-8DDD-986D842ED491}" dt="2025-02-12T19:42:23.413" v="415" actId="20577"/>
+        <pc:sldMkLst>
+          <pc:docMk/>
+          <pc:sldMk cId="3304831784" sldId="275"/>
+        </pc:sldMkLst>
+        <pc:spChg chg="add mod">
+          <ac:chgData name="mm kk" userId="be1857fa1d370b1c" providerId="LiveId" clId="{596F53FF-A99C-42AB-8DDD-986D842ED491}" dt="2025-02-12T19:24:31.870" v="163" actId="255"/>
+          <ac:spMkLst>
+            <pc:docMk/>
+            <pc:sldMk cId="3304831784" sldId="275"/>
+            <ac:spMk id="3" creationId="{440597BB-FD20-0F1F-1E55-5F2D95ABA583}"/>
+          </ac:spMkLst>
+        </pc:spChg>
+        <pc:spChg chg="add mod">
+          <ac:chgData name="mm kk" userId="be1857fa1d370b1c" providerId="LiveId" clId="{596F53FF-A99C-42AB-8DDD-986D842ED491}" dt="2025-02-12T19:42:23.413" v="415" actId="20577"/>
+          <ac:spMkLst>
+            <pc:docMk/>
+            <pc:sldMk cId="3304831784" sldId="275"/>
+            <ac:spMk id="5" creationId="{62FBF355-90E6-6D93-9705-0E2358FBA523}"/>
+          </ac:spMkLst>
+        </pc:spChg>
+        <pc:picChg chg="add del">
+          <ac:chgData name="mm kk" userId="be1857fa1d370b1c" providerId="LiveId" clId="{596F53FF-A99C-42AB-8DDD-986D842ED491}" dt="2025-02-12T19:35:54.148" v="210" actId="22"/>
+          <ac:picMkLst>
+            <pc:docMk/>
+            <pc:sldMk cId="3304831784" sldId="275"/>
+            <ac:picMk id="7" creationId="{DACCEF26-A586-C1A2-118B-CDF3FC22723A}"/>
+          </ac:picMkLst>
+        </pc:picChg>
+      </pc:sldChg>
+      <pc:sldChg chg="new del">
+        <pc:chgData name="mm kk" userId="be1857fa1d370b1c" providerId="LiveId" clId="{596F53FF-A99C-42AB-8DDD-986D842ED491}" dt="2025-02-12T19:23:54.742" v="159" actId="2696"/>
+        <pc:sldMkLst>
+          <pc:docMk/>
+          <pc:sldMk cId="3402607881" sldId="275"/>
+        </pc:sldMkLst>
+      </pc:sldChg>
     </pc:docChg>
   </pc:docChgLst>
 </pc:chgInfo>
@@ -535,7 +579,7 @@
           <a:p>
             <a:fld id="{1314BBB4-4569-4EEB-8B6E-6E27075466F3}" type="datetimeFigureOut">
               <a:rPr lang="ru-KZ" smtClean="0"/>
-              <a:t>12.02.2025</a:t>
+              <a:t>13.02.2025</a:t>
             </a:fld>
             <a:endParaRPr lang="ru-KZ"/>
           </a:p>
@@ -735,7 +779,7 @@
           <a:p>
             <a:fld id="{1314BBB4-4569-4EEB-8B6E-6E27075466F3}" type="datetimeFigureOut">
               <a:rPr lang="ru-KZ" smtClean="0"/>
-              <a:t>12.02.2025</a:t>
+              <a:t>13.02.2025</a:t>
             </a:fld>
             <a:endParaRPr lang="ru-KZ"/>
           </a:p>
@@ -945,7 +989,7 @@
           <a:p>
             <a:fld id="{1314BBB4-4569-4EEB-8B6E-6E27075466F3}" type="datetimeFigureOut">
               <a:rPr lang="ru-KZ" smtClean="0"/>
-              <a:t>12.02.2025</a:t>
+              <a:t>13.02.2025</a:t>
             </a:fld>
             <a:endParaRPr lang="ru-KZ"/>
           </a:p>
@@ -1145,7 +1189,7 @@
           <a:p>
             <a:fld id="{1314BBB4-4569-4EEB-8B6E-6E27075466F3}" type="datetimeFigureOut">
               <a:rPr lang="ru-KZ" smtClean="0"/>
-              <a:t>12.02.2025</a:t>
+              <a:t>13.02.2025</a:t>
             </a:fld>
             <a:endParaRPr lang="ru-KZ"/>
           </a:p>
@@ -1421,7 +1465,7 @@
           <a:p>
             <a:fld id="{1314BBB4-4569-4EEB-8B6E-6E27075466F3}" type="datetimeFigureOut">
               <a:rPr lang="ru-KZ" smtClean="0"/>
-              <a:t>12.02.2025</a:t>
+              <a:t>13.02.2025</a:t>
             </a:fld>
             <a:endParaRPr lang="ru-KZ"/>
           </a:p>
@@ -1689,7 +1733,7 @@
           <a:p>
             <a:fld id="{1314BBB4-4569-4EEB-8B6E-6E27075466F3}" type="datetimeFigureOut">
               <a:rPr lang="ru-KZ" smtClean="0"/>
-              <a:t>12.02.2025</a:t>
+              <a:t>13.02.2025</a:t>
             </a:fld>
             <a:endParaRPr lang="ru-KZ"/>
           </a:p>
@@ -2104,7 +2148,7 @@
           <a:p>
             <a:fld id="{1314BBB4-4569-4EEB-8B6E-6E27075466F3}" type="datetimeFigureOut">
               <a:rPr lang="ru-KZ" smtClean="0"/>
-              <a:t>12.02.2025</a:t>
+              <a:t>13.02.2025</a:t>
             </a:fld>
             <a:endParaRPr lang="ru-KZ"/>
           </a:p>
@@ -2246,7 +2290,7 @@
           <a:p>
             <a:fld id="{1314BBB4-4569-4EEB-8B6E-6E27075466F3}" type="datetimeFigureOut">
               <a:rPr lang="ru-KZ" smtClean="0"/>
-              <a:t>12.02.2025</a:t>
+              <a:t>13.02.2025</a:t>
             </a:fld>
             <a:endParaRPr lang="ru-KZ"/>
           </a:p>
@@ -2359,7 +2403,7 @@
           <a:p>
             <a:fld id="{1314BBB4-4569-4EEB-8B6E-6E27075466F3}" type="datetimeFigureOut">
               <a:rPr lang="ru-KZ" smtClean="0"/>
-              <a:t>12.02.2025</a:t>
+              <a:t>13.02.2025</a:t>
             </a:fld>
             <a:endParaRPr lang="ru-KZ"/>
           </a:p>
@@ -2672,7 +2716,7 @@
           <a:p>
             <a:fld id="{1314BBB4-4569-4EEB-8B6E-6E27075466F3}" type="datetimeFigureOut">
               <a:rPr lang="ru-KZ" smtClean="0"/>
-              <a:t>12.02.2025</a:t>
+              <a:t>13.02.2025</a:t>
             </a:fld>
             <a:endParaRPr lang="ru-KZ"/>
           </a:p>
@@ -2961,7 +3005,7 @@
           <a:p>
             <a:fld id="{1314BBB4-4569-4EEB-8B6E-6E27075466F3}" type="datetimeFigureOut">
               <a:rPr lang="ru-KZ" smtClean="0"/>
-              <a:t>12.02.2025</a:t>
+              <a:t>13.02.2025</a:t>
             </a:fld>
             <a:endParaRPr lang="ru-KZ"/>
           </a:p>
@@ -3204,7 +3248,7 @@
           <a:p>
             <a:fld id="{1314BBB4-4569-4EEB-8B6E-6E27075466F3}" type="datetimeFigureOut">
               <a:rPr lang="ru-KZ" smtClean="0"/>
-              <a:t>12.02.2025</a:t>
+              <a:t>13.02.2025</a:t>
             </a:fld>
             <a:endParaRPr lang="ru-KZ"/>
           </a:p>
@@ -5641,6 +5685,552 @@
     <p:extLst>
       <p:ext uri="{BB962C8B-B14F-4D97-AF65-F5344CB8AC3E}">
         <p14:creationId xmlns:p14="http://schemas.microsoft.com/office/powerpoint/2010/main" val="4101607218"/>
+      </p:ext>
+    </p:extLst>
+  </p:cSld>
+  <p:clrMapOvr>
+    <a:masterClrMapping/>
+  </p:clrMapOvr>
+</p:sld>
+</file>
+
+<file path=ppt/slides/slide18.xml><?xml version="1.0" encoding="utf-8"?>
+<p:sld xmlns:a="http://schemas.openxmlformats.org/drawingml/2006/main" xmlns:r="http://schemas.openxmlformats.org/officeDocument/2006/relationships" xmlns:p="http://schemas.openxmlformats.org/presentationml/2006/main">
+  <p:cSld>
+    <p:spTree>
+      <p:nvGrpSpPr>
+        <p:cNvPr id="1" name=""/>
+        <p:cNvGrpSpPr/>
+        <p:nvPr/>
+      </p:nvGrpSpPr>
+      <p:grpSpPr>
+        <a:xfrm>
+          <a:off x="0" y="0"/>
+          <a:ext cx="0" cy="0"/>
+          <a:chOff x="0" y="0"/>
+          <a:chExt cx="0" cy="0"/>
+        </a:xfrm>
+      </p:grpSpPr>
+      <p:sp>
+        <p:nvSpPr>
+          <p:cNvPr id="3" name="TextBox 2">
+            <a:extLst>
+              <a:ext uri="{FF2B5EF4-FFF2-40B4-BE49-F238E27FC236}">
+                <a16:creationId xmlns:a16="http://schemas.microsoft.com/office/drawing/2014/main" id="{440597BB-FD20-0F1F-1E55-5F2D95ABA583}"/>
+              </a:ext>
+            </a:extLst>
+          </p:cNvPr>
+          <p:cNvSpPr txBox="1"/>
+          <p:nvPr/>
+        </p:nvSpPr>
+        <p:spPr>
+          <a:xfrm>
+            <a:off x="1327355" y="1152521"/>
+            <a:ext cx="6096000" cy="707886"/>
+          </a:xfrm>
+          <a:prstGeom prst="rect">
+            <a:avLst/>
+          </a:prstGeom>
+          <a:noFill/>
+        </p:spPr>
+        <p:txBody>
+          <a:bodyPr wrap="square">
+            <a:spAutoFit/>
+          </a:bodyPr>
+          <a:lstStyle/>
+          <a:p>
+            <a:r>
+              <a:rPr lang="en-US" sz="4000" dirty="0"/>
+              <a:t>References</a:t>
+            </a:r>
+            <a:endParaRPr lang="ru-KZ" sz="4000" dirty="0"/>
+          </a:p>
+        </p:txBody>
+      </p:sp>
+      <p:sp>
+        <p:nvSpPr>
+          <p:cNvPr id="5" name="TextBox 4">
+            <a:extLst>
+              <a:ext uri="{FF2B5EF4-FFF2-40B4-BE49-F238E27FC236}">
+                <a16:creationId xmlns:a16="http://schemas.microsoft.com/office/drawing/2014/main" id="{62FBF355-90E6-6D93-9705-0E2358FBA523}"/>
+              </a:ext>
+            </a:extLst>
+          </p:cNvPr>
+          <p:cNvSpPr txBox="1"/>
+          <p:nvPr/>
+        </p:nvSpPr>
+        <p:spPr>
+          <a:xfrm>
+            <a:off x="1327354" y="2047257"/>
+            <a:ext cx="8416413" cy="5632311"/>
+          </a:xfrm>
+          <a:prstGeom prst="rect">
+            <a:avLst/>
+          </a:prstGeom>
+          <a:noFill/>
+        </p:spPr>
+        <p:txBody>
+          <a:bodyPr wrap="square">
+            <a:spAutoFit/>
+          </a:bodyPr>
+          <a:lstStyle/>
+          <a:p>
+            <a:pPr marL="342900" indent="-342900">
+              <a:buAutoNum type="arabicPeriod"/>
+            </a:pPr>
+            <a:r>
+              <a:rPr lang="en-US" dirty="0" err="1">
+                <a:solidFill>
+                  <a:srgbClr val="242424"/>
+                </a:solidFill>
+                <a:latin typeface="sohne"/>
+              </a:rPr>
+              <a:t>Geekforgeeks</a:t>
+            </a:r>
+            <a:r>
+              <a:rPr lang="en-US" dirty="0">
+                <a:solidFill>
+                  <a:srgbClr val="242424"/>
+                </a:solidFill>
+                <a:latin typeface="sohne"/>
+              </a:rPr>
+              <a:t>. </a:t>
+            </a:r>
+            <a:r>
+              <a:rPr lang="en-US" i="1" dirty="0">
+                <a:solidFill>
+                  <a:srgbClr val="273239"/>
+                </a:solidFill>
+                <a:effectLst/>
+                <a:latin typeface="Source Sans 3"/>
+              </a:rPr>
+              <a:t>Face detection using Cascade Classifier using OpenCV-Python</a:t>
+            </a:r>
+            <a:r>
+              <a:rPr lang="en-US" dirty="0">
+                <a:solidFill>
+                  <a:srgbClr val="273239"/>
+                </a:solidFill>
+                <a:effectLst/>
+                <a:latin typeface="Source Sans 3"/>
+              </a:rPr>
+              <a:t>. – URL: </a:t>
+            </a:r>
+            <a:r>
+              <a:rPr lang="en-US" dirty="0">
+                <a:solidFill>
+                  <a:srgbClr val="273239"/>
+                </a:solidFill>
+                <a:effectLst/>
+                <a:latin typeface="Source Sans 3"/>
+                <a:hlinkClick r:id="rId2"/>
+              </a:rPr>
+              <a:t>https://www.geeksforgeeks.org/face-detection-using-cascade-classifier-using-opencv-python/</a:t>
+            </a:r>
+            <a:r>
+              <a:rPr lang="en-US" dirty="0">
+                <a:solidFill>
+                  <a:srgbClr val="273239"/>
+                </a:solidFill>
+                <a:effectLst/>
+                <a:latin typeface="Source Sans 3"/>
+              </a:rPr>
+              <a:t> (03.10.2023)</a:t>
+            </a:r>
+            <a:endParaRPr lang="ru-RU" dirty="0">
+              <a:solidFill>
+                <a:srgbClr val="273239"/>
+              </a:solidFill>
+              <a:effectLst/>
+              <a:latin typeface="Source Sans 3"/>
+            </a:endParaRPr>
+          </a:p>
+          <a:p>
+            <a:pPr marL="342900" indent="-342900">
+              <a:buAutoNum type="arabicPeriod"/>
+            </a:pPr>
+            <a:r>
+              <a:rPr lang="en-US" b="0" i="0" u="none" strike="noStrike" dirty="0">
+                <a:effectLst/>
+                <a:latin typeface="Inter"/>
+                <a:hlinkClick r:id="rId3" tooltip="Posts by Great Learning Editorial Team"/>
+              </a:rPr>
+              <a:t>Great Learning Editorial Team</a:t>
+            </a:r>
+            <a:r>
+              <a:rPr lang="en-US" b="1" i="0" u="none" strike="noStrike" dirty="0">
+                <a:solidFill>
+                  <a:srgbClr val="273239"/>
+                </a:solidFill>
+                <a:latin typeface="Source Sans 3"/>
+              </a:rPr>
+              <a:t>.</a:t>
+            </a:r>
+            <a:r>
+              <a:rPr lang="ru-RU" b="1" i="0" u="none" strike="noStrike" dirty="0">
+                <a:solidFill>
+                  <a:srgbClr val="273239"/>
+                </a:solidFill>
+                <a:latin typeface="Source Sans 3"/>
+              </a:rPr>
+              <a:t> </a:t>
+            </a:r>
+            <a:r>
+              <a:rPr lang="en-US" i="1" dirty="0">
+                <a:effectLst/>
+                <a:latin typeface="Inter"/>
+              </a:rPr>
+              <a:t>Face Detection using Viola Jones Algorithm</a:t>
+            </a:r>
+            <a:r>
+              <a:rPr lang="ru-RU" i="1" dirty="0">
+                <a:effectLst/>
+                <a:latin typeface="Inter"/>
+              </a:rPr>
+              <a:t>. </a:t>
+            </a:r>
+            <a:r>
+              <a:rPr lang="en-US" i="1" dirty="0">
+                <a:effectLst/>
+                <a:latin typeface="Inter"/>
+              </a:rPr>
+              <a:t>– </a:t>
+            </a:r>
+            <a:r>
+              <a:rPr lang="en-US" dirty="0">
+                <a:latin typeface="Inter"/>
+              </a:rPr>
+              <a:t>URL: </a:t>
+            </a:r>
+            <a:r>
+              <a:rPr lang="en-US" dirty="0">
+                <a:latin typeface="Inter"/>
+                <a:hlinkClick r:id="rId4"/>
+              </a:rPr>
+              <a:t>https://www.mygreatlearning.com/blog/viola-jones-algorithm/</a:t>
+            </a:r>
+            <a:r>
+              <a:rPr lang="en-US" dirty="0">
+                <a:latin typeface="Inter"/>
+              </a:rPr>
+              <a:t> (02.09.2024)</a:t>
+            </a:r>
+          </a:p>
+          <a:p>
+            <a:pPr marL="342900" indent="-342900">
+              <a:buFontTx/>
+              <a:buAutoNum type="arabicPeriod"/>
+            </a:pPr>
+            <a:r>
+              <a:rPr lang="en-US" dirty="0">
+                <a:effectLst/>
+                <a:latin typeface="Inter"/>
+              </a:rPr>
+              <a:t>Andrew D. </a:t>
+            </a:r>
+            <a:r>
+              <a:rPr lang="fr-FR" i="1" dirty="0">
+                <a:solidFill>
+                  <a:srgbClr val="242424"/>
+                </a:solidFill>
+                <a:effectLst/>
+                <a:latin typeface="sohne"/>
+              </a:rPr>
+              <a:t>Computer Vision: Viola-Jones Object </a:t>
+            </a:r>
+            <a:r>
+              <a:rPr lang="fr-FR" i="1" dirty="0" err="1">
+                <a:solidFill>
+                  <a:srgbClr val="242424"/>
+                </a:solidFill>
+                <a:effectLst/>
+                <a:latin typeface="sohne"/>
+              </a:rPr>
+              <a:t>Detection</a:t>
+            </a:r>
+            <a:r>
+              <a:rPr lang="fr-FR" i="0" dirty="0">
+                <a:solidFill>
+                  <a:srgbClr val="242424"/>
+                </a:solidFill>
+                <a:effectLst/>
+                <a:latin typeface="sohne"/>
+              </a:rPr>
+              <a:t>. – URL:</a:t>
+            </a:r>
+            <a:r>
+              <a:rPr lang="ru-RU" i="0" dirty="0">
+                <a:solidFill>
+                  <a:srgbClr val="242424"/>
+                </a:solidFill>
+                <a:effectLst/>
+                <a:latin typeface="sohne"/>
+              </a:rPr>
+              <a:t> </a:t>
+            </a:r>
+            <a:r>
+              <a:rPr lang="en-US" i="0" dirty="0">
+                <a:solidFill>
+                  <a:srgbClr val="242424"/>
+                </a:solidFill>
+                <a:effectLst/>
+                <a:latin typeface="sohne"/>
+                <a:hlinkClick r:id="rId5"/>
+              </a:rPr>
+              <a:t>https://medium.com/@Andrew_D./computer-vision-viola-jones-object-detection-d2a609527b7c</a:t>
+            </a:r>
+            <a:r>
+              <a:rPr lang="ru-RU" i="0" dirty="0">
+                <a:solidFill>
+                  <a:srgbClr val="242424"/>
+                </a:solidFill>
+                <a:effectLst/>
+                <a:latin typeface="sohne"/>
+              </a:rPr>
+              <a:t> (07.12.2022)</a:t>
+            </a:r>
+          </a:p>
+          <a:p>
+            <a:pPr marL="342900" indent="-342900">
+              <a:buFontTx/>
+              <a:buAutoNum type="arabicPeriod"/>
+            </a:pPr>
+            <a:r>
+              <a:rPr lang="en-US" i="0" dirty="0" err="1">
+                <a:solidFill>
+                  <a:srgbClr val="242424"/>
+                </a:solidFill>
+                <a:effectLst/>
+                <a:latin typeface="sohne"/>
+              </a:rPr>
+              <a:t>Kamal_DS</a:t>
+            </a:r>
+            <a:r>
+              <a:rPr lang="en-US" i="0" dirty="0">
+                <a:solidFill>
+                  <a:srgbClr val="242424"/>
+                </a:solidFill>
+                <a:effectLst/>
+                <a:latin typeface="sohne"/>
+              </a:rPr>
+              <a:t>. </a:t>
+            </a:r>
+            <a:r>
+              <a:rPr lang="en-US" i="1" dirty="0">
+                <a:solidFill>
+                  <a:srgbClr val="242424"/>
+                </a:solidFill>
+                <a:effectLst/>
+                <a:latin typeface="sohne"/>
+              </a:rPr>
+              <a:t>Face Detection Using Viola Jones </a:t>
+            </a:r>
+            <a:r>
+              <a:rPr lang="en-US" i="1" dirty="0" err="1">
+                <a:solidFill>
+                  <a:srgbClr val="242424"/>
+                </a:solidFill>
+                <a:effectLst/>
+                <a:latin typeface="sohne"/>
+              </a:rPr>
+              <a:t>Haar_cascade</a:t>
+            </a:r>
+            <a:r>
+              <a:rPr lang="en-US" i="1" dirty="0">
+                <a:solidFill>
+                  <a:srgbClr val="242424"/>
+                </a:solidFill>
+                <a:effectLst/>
+                <a:latin typeface="sohne"/>
+              </a:rPr>
+              <a:t> Classifiers</a:t>
+            </a:r>
+            <a:r>
+              <a:rPr lang="en-US" dirty="0">
+                <a:solidFill>
+                  <a:srgbClr val="242424"/>
+                </a:solidFill>
+                <a:effectLst/>
+                <a:latin typeface="sohne"/>
+              </a:rPr>
+              <a:t>. – URL: </a:t>
+            </a:r>
+            <a:r>
+              <a:rPr lang="en-US" dirty="0">
+                <a:solidFill>
+                  <a:srgbClr val="242424"/>
+                </a:solidFill>
+                <a:effectLst/>
+                <a:latin typeface="sohne"/>
+                <a:hlinkClick r:id="rId6"/>
+              </a:rPr>
+              <a:t>https://korlakuntasaikamal10.medium.com/face-detection-using-viola-jones-haar-cascade-classifiers-d514dc3e1709</a:t>
+            </a:r>
+            <a:r>
+              <a:rPr lang="en-US" dirty="0">
+                <a:solidFill>
+                  <a:srgbClr val="242424"/>
+                </a:solidFill>
+                <a:effectLst/>
+                <a:latin typeface="sohne"/>
+              </a:rPr>
+              <a:t> (21.02.2023)</a:t>
+            </a:r>
+          </a:p>
+          <a:p>
+            <a:pPr marL="342900" indent="-342900">
+              <a:buFontTx/>
+              <a:buAutoNum type="arabicPeriod"/>
+            </a:pPr>
+            <a:r>
+              <a:rPr lang="en-US" dirty="0" err="1">
+                <a:solidFill>
+                  <a:srgbClr val="242424"/>
+                </a:solidFill>
+                <a:effectLst/>
+                <a:latin typeface="sohne"/>
+              </a:rPr>
+              <a:t>A</a:t>
+            </a:r>
+            <a:r>
+              <a:rPr lang="en-US" dirty="0" err="1">
+                <a:solidFill>
+                  <a:srgbClr val="242424"/>
+                </a:solidFill>
+                <a:latin typeface="sohne"/>
+              </a:rPr>
+              <a:t>aronWard</a:t>
+            </a:r>
+            <a:r>
+              <a:rPr lang="en-US" dirty="0">
+                <a:solidFill>
+                  <a:srgbClr val="242424"/>
+                </a:solidFill>
+                <a:latin typeface="sohne"/>
+              </a:rPr>
+              <a:t>. </a:t>
+            </a:r>
+            <a:r>
+              <a:rPr lang="en-US" i="1" dirty="0">
+                <a:solidFill>
+                  <a:srgbClr val="242424"/>
+                </a:solidFill>
+                <a:effectLst/>
+                <a:latin typeface="sohne"/>
+              </a:rPr>
+              <a:t>Facial Detection — Understanding Viola Jones’ Algorithm</a:t>
+            </a:r>
+            <a:r>
+              <a:rPr lang="en-US" dirty="0">
+                <a:solidFill>
+                  <a:srgbClr val="242424"/>
+                </a:solidFill>
+                <a:effectLst/>
+                <a:latin typeface="sohne"/>
+              </a:rPr>
+              <a:t>. </a:t>
+            </a:r>
+            <a:r>
+              <a:rPr lang="en-US">
+                <a:solidFill>
+                  <a:srgbClr val="242424"/>
+                </a:solidFill>
+                <a:effectLst/>
+                <a:latin typeface="sohne"/>
+              </a:rPr>
+              <a:t>– URL: </a:t>
+            </a:r>
+            <a:r>
+              <a:rPr lang="en-US">
+                <a:solidFill>
+                  <a:srgbClr val="242424"/>
+                </a:solidFill>
+                <a:effectLst/>
+                <a:latin typeface="sohne"/>
+                <a:hlinkClick r:id="rId7"/>
+              </a:rPr>
+              <a:t>https://medium.com/@aaronward6210/facial-detection-understanding-viola-jones-algorithm-116d1a9db218</a:t>
+            </a:r>
+            <a:r>
+              <a:rPr lang="en-US">
+                <a:solidFill>
+                  <a:srgbClr val="242424"/>
+                </a:solidFill>
+                <a:effectLst/>
+                <a:latin typeface="sohne"/>
+              </a:rPr>
+              <a:t> (25.01.2020)</a:t>
+            </a:r>
+            <a:endParaRPr lang="en-US" i="1" dirty="0">
+              <a:solidFill>
+                <a:srgbClr val="242424"/>
+              </a:solidFill>
+              <a:effectLst/>
+              <a:latin typeface="sohne"/>
+            </a:endParaRPr>
+          </a:p>
+          <a:p>
+            <a:pPr marL="342900" indent="-342900">
+              <a:buFontTx/>
+              <a:buAutoNum type="arabicPeriod"/>
+            </a:pPr>
+            <a:endParaRPr lang="en-US" dirty="0">
+              <a:solidFill>
+                <a:srgbClr val="242424"/>
+              </a:solidFill>
+              <a:effectLst/>
+              <a:latin typeface="sohne"/>
+            </a:endParaRPr>
+          </a:p>
+          <a:p>
+            <a:pPr marL="342900" indent="-342900">
+              <a:buFontTx/>
+              <a:buAutoNum type="arabicPeriod"/>
+            </a:pPr>
+            <a:endParaRPr lang="fr-FR" i="0" dirty="0">
+              <a:solidFill>
+                <a:srgbClr val="242424"/>
+              </a:solidFill>
+              <a:effectLst/>
+              <a:latin typeface="sohne"/>
+            </a:endParaRPr>
+          </a:p>
+          <a:p>
+            <a:pPr marL="342900" indent="-342900">
+              <a:buAutoNum type="arabicPeriod"/>
+            </a:pPr>
+            <a:endParaRPr lang="en-US" dirty="0">
+              <a:effectLst/>
+              <a:latin typeface="Inter"/>
+            </a:endParaRPr>
+          </a:p>
+          <a:p>
+            <a:br>
+              <a:rPr lang="en-US" b="0" i="0" dirty="0">
+                <a:solidFill>
+                  <a:srgbClr val="444444"/>
+                </a:solidFill>
+                <a:effectLst/>
+                <a:latin typeface="Inter"/>
+              </a:rPr>
+            </a:br>
+            <a:endParaRPr lang="en-US" i="1" dirty="0">
+              <a:solidFill>
+                <a:srgbClr val="273239"/>
+              </a:solidFill>
+              <a:effectLst/>
+              <a:latin typeface="Source Sans 3"/>
+            </a:endParaRPr>
+          </a:p>
+          <a:p>
+            <a:endParaRPr lang="ru-KZ" dirty="0"/>
+          </a:p>
+        </p:txBody>
+      </p:sp>
+    </p:spTree>
+    <p:extLst>
+      <p:ext uri="{BB962C8B-B14F-4D97-AF65-F5344CB8AC3E}">
+        <p14:creationId xmlns:p14="http://schemas.microsoft.com/office/powerpoint/2010/main" val="3304831784"/>
       </p:ext>
     </p:extLst>
   </p:cSld>
